--- a/第6章-雷达测高数据处理程序设计/第2节-星载雷达测高数据处理-4学时.pptx
+++ b/第6章-雷达测高数据处理程序设计/第2节-星载雷达测高数据处理-4学时.pptx
@@ -2122,6 +2122,217 @@
     </pc:docChg>
   </pc:docChgLst>
   <pc:docChgLst>
+    <pc:chgData name="Xin Luo" userId="82312ee5779919a4" providerId="LiveId" clId="{79234F48-1BB4-064A-81D5-23BC2373ADDA}"/>
+    <pc:docChg chg="undo custSel addSld delSld modSld sldOrd">
+      <pc:chgData name="Xin Luo" userId="82312ee5779919a4" providerId="LiveId" clId="{79234F48-1BB4-064A-81D5-23BC2373ADDA}" dt="2023-11-12T11:04:38.280" v="1009" actId="1035"/>
+      <pc:docMkLst>
+        <pc:docMk/>
+      </pc:docMkLst>
+      <pc:sldChg chg="delSp modSp mod">
+        <pc:chgData name="Xin Luo" userId="82312ee5779919a4" providerId="LiveId" clId="{79234F48-1BB4-064A-81D5-23BC2373ADDA}" dt="2023-11-12T10:57:52.252" v="773" actId="14100"/>
+        <pc:sldMkLst>
+          <pc:docMk/>
+          <pc:sldMk cId="1858913004" sldId="2719"/>
+        </pc:sldMkLst>
+        <pc:spChg chg="del">
+          <ac:chgData name="Xin Luo" userId="82312ee5779919a4" providerId="LiveId" clId="{79234F48-1BB4-064A-81D5-23BC2373ADDA}" dt="2023-11-12T10:56:15.125" v="602" actId="478"/>
+          <ac:spMkLst>
+            <pc:docMk/>
+            <pc:sldMk cId="1858913004" sldId="2719"/>
+            <ac:spMk id="2" creationId="{631AADB6-C88A-D817-4683-FC087E4E240F}"/>
+          </ac:spMkLst>
+        </pc:spChg>
+        <pc:spChg chg="mod">
+          <ac:chgData name="Xin Luo" userId="82312ee5779919a4" providerId="LiveId" clId="{79234F48-1BB4-064A-81D5-23BC2373ADDA}" dt="2023-11-12T10:56:12.362" v="601" actId="20577"/>
+          <ac:spMkLst>
+            <pc:docMk/>
+            <pc:sldMk cId="1858913004" sldId="2719"/>
+            <ac:spMk id="4" creationId="{814FF4E1-B17F-D4F8-E834-173BA3B0D059}"/>
+          </ac:spMkLst>
+        </pc:spChg>
+        <pc:spChg chg="del">
+          <ac:chgData name="Xin Luo" userId="82312ee5779919a4" providerId="LiveId" clId="{79234F48-1BB4-064A-81D5-23BC2373ADDA}" dt="2023-11-12T10:56:15.125" v="602" actId="478"/>
+          <ac:spMkLst>
+            <pc:docMk/>
+            <pc:sldMk cId="1858913004" sldId="2719"/>
+            <ac:spMk id="5" creationId="{FCD10A89-5E0E-5D73-1D4F-9E11D943B29C}"/>
+          </ac:spMkLst>
+        </pc:spChg>
+        <pc:spChg chg="mod">
+          <ac:chgData name="Xin Luo" userId="82312ee5779919a4" providerId="LiveId" clId="{79234F48-1BB4-064A-81D5-23BC2373ADDA}" dt="2023-11-12T10:57:52.252" v="773" actId="14100"/>
+          <ac:spMkLst>
+            <pc:docMk/>
+            <pc:sldMk cId="1858913004" sldId="2719"/>
+            <ac:spMk id="6" creationId="{10943A92-9E22-44EA-2939-C64F8E264329}"/>
+          </ac:spMkLst>
+        </pc:spChg>
+      </pc:sldChg>
+      <pc:sldChg chg="modSp del mod">
+        <pc:chgData name="Xin Luo" userId="82312ee5779919a4" providerId="LiveId" clId="{79234F48-1BB4-064A-81D5-23BC2373ADDA}" dt="2023-11-12T10:13:36.173" v="18" actId="2696"/>
+        <pc:sldMkLst>
+          <pc:docMk/>
+          <pc:sldMk cId="295872025" sldId="2722"/>
+        </pc:sldMkLst>
+        <pc:spChg chg="mod">
+          <ac:chgData name="Xin Luo" userId="82312ee5779919a4" providerId="LiveId" clId="{79234F48-1BB4-064A-81D5-23BC2373ADDA}" dt="2023-11-12T10:13:32.597" v="17" actId="20577"/>
+          <ac:spMkLst>
+            <pc:docMk/>
+            <pc:sldMk cId="295872025" sldId="2722"/>
+            <ac:spMk id="12" creationId="{00000000-0000-0000-0000-000000000000}"/>
+          </ac:spMkLst>
+        </pc:spChg>
+      </pc:sldChg>
+      <pc:sldChg chg="modSp mod">
+        <pc:chgData name="Xin Luo" userId="82312ee5779919a4" providerId="LiveId" clId="{79234F48-1BB4-064A-81D5-23BC2373ADDA}" dt="2023-11-12T10:47:06.270" v="528" actId="20577"/>
+        <pc:sldMkLst>
+          <pc:docMk/>
+          <pc:sldMk cId="623131075" sldId="2727"/>
+        </pc:sldMkLst>
+        <pc:spChg chg="mod">
+          <ac:chgData name="Xin Luo" userId="82312ee5779919a4" providerId="LiveId" clId="{79234F48-1BB4-064A-81D5-23BC2373ADDA}" dt="2023-11-12T10:47:06.270" v="528" actId="20577"/>
+          <ac:spMkLst>
+            <pc:docMk/>
+            <pc:sldMk cId="623131075" sldId="2727"/>
+            <ac:spMk id="4" creationId="{DFE91C0B-C9F8-3FEC-3419-2DE0C6E6DCB8}"/>
+          </ac:spMkLst>
+        </pc:spChg>
+        <pc:spChg chg="mod">
+          <ac:chgData name="Xin Luo" userId="82312ee5779919a4" providerId="LiveId" clId="{79234F48-1BB4-064A-81D5-23BC2373ADDA}" dt="2023-11-12T10:45:05.908" v="501" actId="20577"/>
+          <ac:spMkLst>
+            <pc:docMk/>
+            <pc:sldMk cId="623131075" sldId="2727"/>
+            <ac:spMk id="17" creationId="{9E05FFCA-3371-AF5C-381D-71D984055F5A}"/>
+          </ac:spMkLst>
+        </pc:spChg>
+      </pc:sldChg>
+      <pc:sldChg chg="addSp delSp modSp mod">
+        <pc:chgData name="Xin Luo" userId="82312ee5779919a4" providerId="LiveId" clId="{79234F48-1BB4-064A-81D5-23BC2373ADDA}" dt="2023-11-12T11:04:38.280" v="1009" actId="1035"/>
+        <pc:sldMkLst>
+          <pc:docMk/>
+          <pc:sldMk cId="1382737206" sldId="2735"/>
+        </pc:sldMkLst>
+        <pc:spChg chg="add mod">
+          <ac:chgData name="Xin Luo" userId="82312ee5779919a4" providerId="LiveId" clId="{79234F48-1BB4-064A-81D5-23BC2373ADDA}" dt="2023-11-12T10:47:42.911" v="537" actId="207"/>
+          <ac:spMkLst>
+            <pc:docMk/>
+            <pc:sldMk cId="1382737206" sldId="2735"/>
+            <ac:spMk id="2" creationId="{36A94F0A-9BCF-0783-70D7-65A53B9C0CC3}"/>
+          </ac:spMkLst>
+        </pc:spChg>
+        <pc:spChg chg="mod">
+          <ac:chgData name="Xin Luo" userId="82312ee5779919a4" providerId="LiveId" clId="{79234F48-1BB4-064A-81D5-23BC2373ADDA}" dt="2023-11-12T10:47:11.148" v="529"/>
+          <ac:spMkLst>
+            <pc:docMk/>
+            <pc:sldMk cId="1382737206" sldId="2735"/>
+            <ac:spMk id="4" creationId="{DFE91C0B-C9F8-3FEC-3419-2DE0C6E6DCB8}"/>
+          </ac:spMkLst>
+        </pc:spChg>
+        <pc:spChg chg="add mod">
+          <ac:chgData name="Xin Luo" userId="82312ee5779919a4" providerId="LiveId" clId="{79234F48-1BB4-064A-81D5-23BC2373ADDA}" dt="2023-11-12T10:49:13.024" v="582" actId="1036"/>
+          <ac:spMkLst>
+            <pc:docMk/>
+            <pc:sldMk cId="1382737206" sldId="2735"/>
+            <ac:spMk id="8" creationId="{B922BC94-544E-9C03-7774-A6A5C31A858E}"/>
+          </ac:spMkLst>
+        </pc:spChg>
+        <pc:spChg chg="add mod">
+          <ac:chgData name="Xin Luo" userId="82312ee5779919a4" providerId="LiveId" clId="{79234F48-1BB4-064A-81D5-23BC2373ADDA}" dt="2023-11-12T11:04:38.280" v="1009" actId="1035"/>
+          <ac:spMkLst>
+            <pc:docMk/>
+            <pc:sldMk cId="1382737206" sldId="2735"/>
+            <ac:spMk id="10" creationId="{A617D2EC-E886-F05D-06BB-4F44EC4E8448}"/>
+          </ac:spMkLst>
+        </pc:spChg>
+        <pc:spChg chg="mod">
+          <ac:chgData name="Xin Luo" userId="82312ee5779919a4" providerId="LiveId" clId="{79234F48-1BB4-064A-81D5-23BC2373ADDA}" dt="2023-11-12T10:13:09.041" v="4" actId="20577"/>
+          <ac:spMkLst>
+            <pc:docMk/>
+            <pc:sldMk cId="1382737206" sldId="2735"/>
+            <ac:spMk id="37" creationId="{3AF78166-75AC-74B5-C0D9-CAC71F413EF4}"/>
+          </ac:spMkLst>
+        </pc:spChg>
+        <pc:spChg chg="topLvl">
+          <ac:chgData name="Xin Luo" userId="82312ee5779919a4" providerId="LiveId" clId="{79234F48-1BB4-064A-81D5-23BC2373ADDA}" dt="2023-11-12T10:47:25.889" v="530" actId="165"/>
+          <ac:spMkLst>
+            <pc:docMk/>
+            <pc:sldMk cId="1382737206" sldId="2735"/>
+            <ac:spMk id="41" creationId="{2D07906B-FAF1-117B-E6A7-6D191EC4E883}"/>
+          </ac:spMkLst>
+        </pc:spChg>
+        <pc:grpChg chg="add mod">
+          <ac:chgData name="Xin Luo" userId="82312ee5779919a4" providerId="LiveId" clId="{79234F48-1BB4-064A-81D5-23BC2373ADDA}" dt="2023-11-12T11:04:22.418" v="997" actId="1035"/>
+          <ac:grpSpMkLst>
+            <pc:docMk/>
+            <pc:sldMk cId="1382737206" sldId="2735"/>
+            <ac:grpSpMk id="12" creationId="{1CD3369D-14E8-EFF9-8B4C-1BB6590169C3}"/>
+          </ac:grpSpMkLst>
+        </pc:grpChg>
+        <pc:grpChg chg="topLvl">
+          <ac:chgData name="Xin Luo" userId="82312ee5779919a4" providerId="LiveId" clId="{79234F48-1BB4-064A-81D5-23BC2373ADDA}" dt="2023-11-12T10:47:25.889" v="530" actId="165"/>
+          <ac:grpSpMkLst>
+            <pc:docMk/>
+            <pc:sldMk cId="1382737206" sldId="2735"/>
+            <ac:grpSpMk id="38" creationId="{1706D5B6-D65B-D942-309B-39F7DCB1E0D8}"/>
+          </ac:grpSpMkLst>
+        </pc:grpChg>
+        <pc:grpChg chg="del">
+          <ac:chgData name="Xin Luo" userId="82312ee5779919a4" providerId="LiveId" clId="{79234F48-1BB4-064A-81D5-23BC2373ADDA}" dt="2023-11-12T10:47:25.889" v="530" actId="165"/>
+          <ac:grpSpMkLst>
+            <pc:docMk/>
+            <pc:sldMk cId="1382737206" sldId="2735"/>
+            <ac:grpSpMk id="42" creationId="{3451DAC0-9E36-89C4-18C1-A0826EEC42B1}"/>
+          </ac:grpSpMkLst>
+        </pc:grpChg>
+        <pc:picChg chg="topLvl">
+          <ac:chgData name="Xin Luo" userId="82312ee5779919a4" providerId="LiveId" clId="{79234F48-1BB4-064A-81D5-23BC2373ADDA}" dt="2023-11-12T10:47:25.889" v="530" actId="165"/>
+          <ac:picMkLst>
+            <pc:docMk/>
+            <pc:sldMk cId="1382737206" sldId="2735"/>
+            <ac:picMk id="40" creationId="{7BAE91F7-A638-70DC-226F-AF9FF51A81EA}"/>
+          </ac:picMkLst>
+        </pc:picChg>
+        <pc:cxnChg chg="add mod">
+          <ac:chgData name="Xin Luo" userId="82312ee5779919a4" providerId="LiveId" clId="{79234F48-1BB4-064A-81D5-23BC2373ADDA}" dt="2023-11-12T10:55:49.883" v="584" actId="208"/>
+          <ac:cxnSpMkLst>
+            <pc:docMk/>
+            <pc:sldMk cId="1382737206" sldId="2735"/>
+            <ac:cxnSpMk id="6" creationId="{C73A7FF0-C417-B2B7-6C67-466B0FB66050}"/>
+          </ac:cxnSpMkLst>
+        </pc:cxnChg>
+      </pc:sldChg>
+      <pc:sldChg chg="modSp add mod ord">
+        <pc:chgData name="Xin Luo" userId="82312ee5779919a4" providerId="LiveId" clId="{79234F48-1BB4-064A-81D5-23BC2373ADDA}" dt="2023-11-12T10:45:23.169" v="503" actId="14100"/>
+        <pc:sldMkLst>
+          <pc:docMk/>
+          <pc:sldMk cId="3782770681" sldId="2736"/>
+        </pc:sldMkLst>
+        <pc:spChg chg="mod">
+          <ac:chgData name="Xin Luo" userId="82312ee5779919a4" providerId="LiveId" clId="{79234F48-1BB4-064A-81D5-23BC2373ADDA}" dt="2023-11-12T10:14:33.890" v="79" actId="20577"/>
+          <ac:spMkLst>
+            <pc:docMk/>
+            <pc:sldMk cId="3782770681" sldId="2736"/>
+            <ac:spMk id="4" creationId="{DFE91C0B-C9F8-3FEC-3419-2DE0C6E6DCB8}"/>
+          </ac:spMkLst>
+        </pc:spChg>
+        <pc:spChg chg="mod">
+          <ac:chgData name="Xin Luo" userId="82312ee5779919a4" providerId="LiveId" clId="{79234F48-1BB4-064A-81D5-23BC2373ADDA}" dt="2023-11-12T10:45:23.169" v="503" actId="14100"/>
+          <ac:spMkLst>
+            <pc:docMk/>
+            <pc:sldMk cId="3782770681" sldId="2736"/>
+            <ac:spMk id="17" creationId="{9E05FFCA-3371-AF5C-381D-71D984055F5A}"/>
+          </ac:spMkLst>
+        </pc:spChg>
+      </pc:sldChg>
+      <pc:sldChg chg="add del">
+        <pc:chgData name="Xin Luo" userId="82312ee5779919a4" providerId="LiveId" clId="{79234F48-1BB4-064A-81D5-23BC2373ADDA}" dt="2023-11-12T10:14:48.939" v="82"/>
+        <pc:sldMkLst>
+          <pc:docMk/>
+          <pc:sldMk cId="3003986440" sldId="2737"/>
+        </pc:sldMkLst>
+      </pc:sldChg>
+    </pc:docChg>
+  </pc:docChgLst>
+  <pc:docChgLst>
     <pc:chgData name="Xin Luo" userId="82312ee5779919a4" providerId="LiveId" clId="{CF65213B-FDED-4E4E-A9AA-40904858F740}"/>
     <pc:docChg chg="undo custSel addSld modSld">
       <pc:chgData name="Xin Luo" userId="82312ee5779919a4" providerId="LiveId" clId="{CF65213B-FDED-4E4E-A9AA-40904858F740}" dt="2023-11-12T15:29:23.089" v="1384" actId="20577"/>
@@ -2323,217 +2534,6 @@
             <ac:spMk id="17" creationId="{9E05FFCA-3371-AF5C-381D-71D984055F5A}"/>
           </ac:spMkLst>
         </pc:spChg>
-      </pc:sldChg>
-    </pc:docChg>
-  </pc:docChgLst>
-  <pc:docChgLst>
-    <pc:chgData name="Xin Luo" userId="82312ee5779919a4" providerId="LiveId" clId="{79234F48-1BB4-064A-81D5-23BC2373ADDA}"/>
-    <pc:docChg chg="undo custSel addSld delSld modSld sldOrd">
-      <pc:chgData name="Xin Luo" userId="82312ee5779919a4" providerId="LiveId" clId="{79234F48-1BB4-064A-81D5-23BC2373ADDA}" dt="2023-11-12T11:04:38.280" v="1009" actId="1035"/>
-      <pc:docMkLst>
-        <pc:docMk/>
-      </pc:docMkLst>
-      <pc:sldChg chg="delSp modSp mod">
-        <pc:chgData name="Xin Luo" userId="82312ee5779919a4" providerId="LiveId" clId="{79234F48-1BB4-064A-81D5-23BC2373ADDA}" dt="2023-11-12T10:57:52.252" v="773" actId="14100"/>
-        <pc:sldMkLst>
-          <pc:docMk/>
-          <pc:sldMk cId="1858913004" sldId="2719"/>
-        </pc:sldMkLst>
-        <pc:spChg chg="del">
-          <ac:chgData name="Xin Luo" userId="82312ee5779919a4" providerId="LiveId" clId="{79234F48-1BB4-064A-81D5-23BC2373ADDA}" dt="2023-11-12T10:56:15.125" v="602" actId="478"/>
-          <ac:spMkLst>
-            <pc:docMk/>
-            <pc:sldMk cId="1858913004" sldId="2719"/>
-            <ac:spMk id="2" creationId="{631AADB6-C88A-D817-4683-FC087E4E240F}"/>
-          </ac:spMkLst>
-        </pc:spChg>
-        <pc:spChg chg="mod">
-          <ac:chgData name="Xin Luo" userId="82312ee5779919a4" providerId="LiveId" clId="{79234F48-1BB4-064A-81D5-23BC2373ADDA}" dt="2023-11-12T10:56:12.362" v="601" actId="20577"/>
-          <ac:spMkLst>
-            <pc:docMk/>
-            <pc:sldMk cId="1858913004" sldId="2719"/>
-            <ac:spMk id="4" creationId="{814FF4E1-B17F-D4F8-E834-173BA3B0D059}"/>
-          </ac:spMkLst>
-        </pc:spChg>
-        <pc:spChg chg="del">
-          <ac:chgData name="Xin Luo" userId="82312ee5779919a4" providerId="LiveId" clId="{79234F48-1BB4-064A-81D5-23BC2373ADDA}" dt="2023-11-12T10:56:15.125" v="602" actId="478"/>
-          <ac:spMkLst>
-            <pc:docMk/>
-            <pc:sldMk cId="1858913004" sldId="2719"/>
-            <ac:spMk id="5" creationId="{FCD10A89-5E0E-5D73-1D4F-9E11D943B29C}"/>
-          </ac:spMkLst>
-        </pc:spChg>
-        <pc:spChg chg="mod">
-          <ac:chgData name="Xin Luo" userId="82312ee5779919a4" providerId="LiveId" clId="{79234F48-1BB4-064A-81D5-23BC2373ADDA}" dt="2023-11-12T10:57:52.252" v="773" actId="14100"/>
-          <ac:spMkLst>
-            <pc:docMk/>
-            <pc:sldMk cId="1858913004" sldId="2719"/>
-            <ac:spMk id="6" creationId="{10943A92-9E22-44EA-2939-C64F8E264329}"/>
-          </ac:spMkLst>
-        </pc:spChg>
-      </pc:sldChg>
-      <pc:sldChg chg="modSp del mod">
-        <pc:chgData name="Xin Luo" userId="82312ee5779919a4" providerId="LiveId" clId="{79234F48-1BB4-064A-81D5-23BC2373ADDA}" dt="2023-11-12T10:13:36.173" v="18" actId="2696"/>
-        <pc:sldMkLst>
-          <pc:docMk/>
-          <pc:sldMk cId="295872025" sldId="2722"/>
-        </pc:sldMkLst>
-        <pc:spChg chg="mod">
-          <ac:chgData name="Xin Luo" userId="82312ee5779919a4" providerId="LiveId" clId="{79234F48-1BB4-064A-81D5-23BC2373ADDA}" dt="2023-11-12T10:13:32.597" v="17" actId="20577"/>
-          <ac:spMkLst>
-            <pc:docMk/>
-            <pc:sldMk cId="295872025" sldId="2722"/>
-            <ac:spMk id="12" creationId="{00000000-0000-0000-0000-000000000000}"/>
-          </ac:spMkLst>
-        </pc:spChg>
-      </pc:sldChg>
-      <pc:sldChg chg="modSp mod">
-        <pc:chgData name="Xin Luo" userId="82312ee5779919a4" providerId="LiveId" clId="{79234F48-1BB4-064A-81D5-23BC2373ADDA}" dt="2023-11-12T10:47:06.270" v="528" actId="20577"/>
-        <pc:sldMkLst>
-          <pc:docMk/>
-          <pc:sldMk cId="623131075" sldId="2727"/>
-        </pc:sldMkLst>
-        <pc:spChg chg="mod">
-          <ac:chgData name="Xin Luo" userId="82312ee5779919a4" providerId="LiveId" clId="{79234F48-1BB4-064A-81D5-23BC2373ADDA}" dt="2023-11-12T10:47:06.270" v="528" actId="20577"/>
-          <ac:spMkLst>
-            <pc:docMk/>
-            <pc:sldMk cId="623131075" sldId="2727"/>
-            <ac:spMk id="4" creationId="{DFE91C0B-C9F8-3FEC-3419-2DE0C6E6DCB8}"/>
-          </ac:spMkLst>
-        </pc:spChg>
-        <pc:spChg chg="mod">
-          <ac:chgData name="Xin Luo" userId="82312ee5779919a4" providerId="LiveId" clId="{79234F48-1BB4-064A-81D5-23BC2373ADDA}" dt="2023-11-12T10:45:05.908" v="501" actId="20577"/>
-          <ac:spMkLst>
-            <pc:docMk/>
-            <pc:sldMk cId="623131075" sldId="2727"/>
-            <ac:spMk id="17" creationId="{9E05FFCA-3371-AF5C-381D-71D984055F5A}"/>
-          </ac:spMkLst>
-        </pc:spChg>
-      </pc:sldChg>
-      <pc:sldChg chg="addSp delSp modSp mod">
-        <pc:chgData name="Xin Luo" userId="82312ee5779919a4" providerId="LiveId" clId="{79234F48-1BB4-064A-81D5-23BC2373ADDA}" dt="2023-11-12T11:04:38.280" v="1009" actId="1035"/>
-        <pc:sldMkLst>
-          <pc:docMk/>
-          <pc:sldMk cId="1382737206" sldId="2735"/>
-        </pc:sldMkLst>
-        <pc:spChg chg="add mod">
-          <ac:chgData name="Xin Luo" userId="82312ee5779919a4" providerId="LiveId" clId="{79234F48-1BB4-064A-81D5-23BC2373ADDA}" dt="2023-11-12T10:47:42.911" v="537" actId="207"/>
-          <ac:spMkLst>
-            <pc:docMk/>
-            <pc:sldMk cId="1382737206" sldId="2735"/>
-            <ac:spMk id="2" creationId="{36A94F0A-9BCF-0783-70D7-65A53B9C0CC3}"/>
-          </ac:spMkLst>
-        </pc:spChg>
-        <pc:spChg chg="mod">
-          <ac:chgData name="Xin Luo" userId="82312ee5779919a4" providerId="LiveId" clId="{79234F48-1BB4-064A-81D5-23BC2373ADDA}" dt="2023-11-12T10:47:11.148" v="529"/>
-          <ac:spMkLst>
-            <pc:docMk/>
-            <pc:sldMk cId="1382737206" sldId="2735"/>
-            <ac:spMk id="4" creationId="{DFE91C0B-C9F8-3FEC-3419-2DE0C6E6DCB8}"/>
-          </ac:spMkLst>
-        </pc:spChg>
-        <pc:spChg chg="add mod">
-          <ac:chgData name="Xin Luo" userId="82312ee5779919a4" providerId="LiveId" clId="{79234F48-1BB4-064A-81D5-23BC2373ADDA}" dt="2023-11-12T10:49:13.024" v="582" actId="1036"/>
-          <ac:spMkLst>
-            <pc:docMk/>
-            <pc:sldMk cId="1382737206" sldId="2735"/>
-            <ac:spMk id="8" creationId="{B922BC94-544E-9C03-7774-A6A5C31A858E}"/>
-          </ac:spMkLst>
-        </pc:spChg>
-        <pc:spChg chg="add mod">
-          <ac:chgData name="Xin Luo" userId="82312ee5779919a4" providerId="LiveId" clId="{79234F48-1BB4-064A-81D5-23BC2373ADDA}" dt="2023-11-12T11:04:38.280" v="1009" actId="1035"/>
-          <ac:spMkLst>
-            <pc:docMk/>
-            <pc:sldMk cId="1382737206" sldId="2735"/>
-            <ac:spMk id="10" creationId="{A617D2EC-E886-F05D-06BB-4F44EC4E8448}"/>
-          </ac:spMkLst>
-        </pc:spChg>
-        <pc:spChg chg="mod">
-          <ac:chgData name="Xin Luo" userId="82312ee5779919a4" providerId="LiveId" clId="{79234F48-1BB4-064A-81D5-23BC2373ADDA}" dt="2023-11-12T10:13:09.041" v="4" actId="20577"/>
-          <ac:spMkLst>
-            <pc:docMk/>
-            <pc:sldMk cId="1382737206" sldId="2735"/>
-            <ac:spMk id="37" creationId="{3AF78166-75AC-74B5-C0D9-CAC71F413EF4}"/>
-          </ac:spMkLst>
-        </pc:spChg>
-        <pc:spChg chg="topLvl">
-          <ac:chgData name="Xin Luo" userId="82312ee5779919a4" providerId="LiveId" clId="{79234F48-1BB4-064A-81D5-23BC2373ADDA}" dt="2023-11-12T10:47:25.889" v="530" actId="165"/>
-          <ac:spMkLst>
-            <pc:docMk/>
-            <pc:sldMk cId="1382737206" sldId="2735"/>
-            <ac:spMk id="41" creationId="{2D07906B-FAF1-117B-E6A7-6D191EC4E883}"/>
-          </ac:spMkLst>
-        </pc:spChg>
-        <pc:grpChg chg="add mod">
-          <ac:chgData name="Xin Luo" userId="82312ee5779919a4" providerId="LiveId" clId="{79234F48-1BB4-064A-81D5-23BC2373ADDA}" dt="2023-11-12T11:04:22.418" v="997" actId="1035"/>
-          <ac:grpSpMkLst>
-            <pc:docMk/>
-            <pc:sldMk cId="1382737206" sldId="2735"/>
-            <ac:grpSpMk id="12" creationId="{1CD3369D-14E8-EFF9-8B4C-1BB6590169C3}"/>
-          </ac:grpSpMkLst>
-        </pc:grpChg>
-        <pc:grpChg chg="topLvl">
-          <ac:chgData name="Xin Luo" userId="82312ee5779919a4" providerId="LiveId" clId="{79234F48-1BB4-064A-81D5-23BC2373ADDA}" dt="2023-11-12T10:47:25.889" v="530" actId="165"/>
-          <ac:grpSpMkLst>
-            <pc:docMk/>
-            <pc:sldMk cId="1382737206" sldId="2735"/>
-            <ac:grpSpMk id="38" creationId="{1706D5B6-D65B-D942-309B-39F7DCB1E0D8}"/>
-          </ac:grpSpMkLst>
-        </pc:grpChg>
-        <pc:grpChg chg="del">
-          <ac:chgData name="Xin Luo" userId="82312ee5779919a4" providerId="LiveId" clId="{79234F48-1BB4-064A-81D5-23BC2373ADDA}" dt="2023-11-12T10:47:25.889" v="530" actId="165"/>
-          <ac:grpSpMkLst>
-            <pc:docMk/>
-            <pc:sldMk cId="1382737206" sldId="2735"/>
-            <ac:grpSpMk id="42" creationId="{3451DAC0-9E36-89C4-18C1-A0826EEC42B1}"/>
-          </ac:grpSpMkLst>
-        </pc:grpChg>
-        <pc:picChg chg="topLvl">
-          <ac:chgData name="Xin Luo" userId="82312ee5779919a4" providerId="LiveId" clId="{79234F48-1BB4-064A-81D5-23BC2373ADDA}" dt="2023-11-12T10:47:25.889" v="530" actId="165"/>
-          <ac:picMkLst>
-            <pc:docMk/>
-            <pc:sldMk cId="1382737206" sldId="2735"/>
-            <ac:picMk id="40" creationId="{7BAE91F7-A638-70DC-226F-AF9FF51A81EA}"/>
-          </ac:picMkLst>
-        </pc:picChg>
-        <pc:cxnChg chg="add mod">
-          <ac:chgData name="Xin Luo" userId="82312ee5779919a4" providerId="LiveId" clId="{79234F48-1BB4-064A-81D5-23BC2373ADDA}" dt="2023-11-12T10:55:49.883" v="584" actId="208"/>
-          <ac:cxnSpMkLst>
-            <pc:docMk/>
-            <pc:sldMk cId="1382737206" sldId="2735"/>
-            <ac:cxnSpMk id="6" creationId="{C73A7FF0-C417-B2B7-6C67-466B0FB66050}"/>
-          </ac:cxnSpMkLst>
-        </pc:cxnChg>
-      </pc:sldChg>
-      <pc:sldChg chg="modSp add mod ord">
-        <pc:chgData name="Xin Luo" userId="82312ee5779919a4" providerId="LiveId" clId="{79234F48-1BB4-064A-81D5-23BC2373ADDA}" dt="2023-11-12T10:45:23.169" v="503" actId="14100"/>
-        <pc:sldMkLst>
-          <pc:docMk/>
-          <pc:sldMk cId="3782770681" sldId="2736"/>
-        </pc:sldMkLst>
-        <pc:spChg chg="mod">
-          <ac:chgData name="Xin Luo" userId="82312ee5779919a4" providerId="LiveId" clId="{79234F48-1BB4-064A-81D5-23BC2373ADDA}" dt="2023-11-12T10:14:33.890" v="79" actId="20577"/>
-          <ac:spMkLst>
-            <pc:docMk/>
-            <pc:sldMk cId="3782770681" sldId="2736"/>
-            <ac:spMk id="4" creationId="{DFE91C0B-C9F8-3FEC-3419-2DE0C6E6DCB8}"/>
-          </ac:spMkLst>
-        </pc:spChg>
-        <pc:spChg chg="mod">
-          <ac:chgData name="Xin Luo" userId="82312ee5779919a4" providerId="LiveId" clId="{79234F48-1BB4-064A-81D5-23BC2373ADDA}" dt="2023-11-12T10:45:23.169" v="503" actId="14100"/>
-          <ac:spMkLst>
-            <pc:docMk/>
-            <pc:sldMk cId="3782770681" sldId="2736"/>
-            <ac:spMk id="17" creationId="{9E05FFCA-3371-AF5C-381D-71D984055F5A}"/>
-          </ac:spMkLst>
-        </pc:spChg>
-      </pc:sldChg>
-      <pc:sldChg chg="add del">
-        <pc:chgData name="Xin Luo" userId="82312ee5779919a4" providerId="LiveId" clId="{79234F48-1BB4-064A-81D5-23BC2373ADDA}" dt="2023-11-12T10:14:48.939" v="82"/>
-        <pc:sldMkLst>
-          <pc:docMk/>
-          <pc:sldMk cId="3003986440" sldId="2737"/>
-        </pc:sldMkLst>
       </pc:sldChg>
     </pc:docChg>
   </pc:docChgLst>
@@ -4208,7 +4208,7 @@
               </a14:hiddenFill>
             </a:ext>
             <a:ext uri="{FAA26D3D-D897-4be2-8F04-BA451C77F1D7}">
-              <ma14:placeholderFlag xmlns:ma14="http://schemas.microsoft.com/office/mac/drawingml/2011/main" xmlns="" val="1"/>
+              <ma14:placeholderFlag xmlns="" xmlns:ma14="http://schemas.microsoft.com/office/mac/drawingml/2011/main" val="1"/>
             </a:ext>
           </a:extLst>
         </p:spPr>
@@ -4592,7 +4592,7 @@
               </a14:hiddenLine>
             </a:ext>
             <a:ext uri="{FAA26D3D-D897-4be2-8F04-BA451C77F1D7}">
-              <ma14:placeholderFlag xmlns:ma14="http://schemas.microsoft.com/office/mac/drawingml/2011/main" xmlns="" val="1"/>
+              <ma14:placeholderFlag xmlns="" xmlns:ma14="http://schemas.microsoft.com/office/mac/drawingml/2011/main" val="1"/>
             </a:ext>
           </a:extLst>
         </p:spPr>
@@ -6700,7 +6700,7 @@
               </a14:hiddenLine>
             </a:ext>
             <a:ext uri="{FAA26D3D-D897-4be2-8F04-BA451C77F1D7}">
-              <ma14:placeholderFlag xmlns:ma14="http://schemas.microsoft.com/office/mac/drawingml/2011/main" xmlns="" val="1"/>
+              <ma14:placeholderFlag xmlns="" xmlns:ma14="http://schemas.microsoft.com/office/mac/drawingml/2011/main" val="1"/>
             </a:ext>
           </a:extLst>
         </p:spPr>
@@ -10391,7 +10391,7 @@
               </a14:hiddenLine>
             </a:ext>
             <a:ext uri="{FAA26D3D-D897-4be2-8F04-BA451C77F1D7}">
-              <ma14:placeholderFlag xmlns:ma14="http://schemas.microsoft.com/office/mac/drawingml/2011/main" xmlns="" val="1"/>
+              <ma14:placeholderFlag xmlns="" xmlns:ma14="http://schemas.microsoft.com/office/mac/drawingml/2011/main" val="1"/>
             </a:ext>
           </a:extLst>
         </p:spPr>
@@ -12554,6 +12554,22 @@
               <a:defRPr/>
             </a:pPr>
             <a:r>
+              <a:rPr kumimoji="0" lang="zh-CN" altLang="en-US" sz="2000" b="1" i="1" u="none" strike="noStrike" kern="1200" cap="none" spc="0" normalizeH="0" baseline="0" noProof="0" dirty="0">
+                <a:ln>
+                  <a:noFill/>
+                </a:ln>
+                <a:solidFill>
+                  <a:prstClr val="black"/>
+                </a:solidFill>
+                <a:effectLst/>
+                <a:uLnTx/>
+                <a:uFillTx/>
+                <a:latin typeface="Times New Roman" charset="0"/>
+                <a:ea typeface="宋体" charset="0"/>
+              </a:rPr>
+              <a:t>遥感数据处理程序设计</a:t>
+            </a:r>
+            <a:r>
               <a:rPr kumimoji="0" lang="en-CN" sz="2000" b="1" i="1" u="none" strike="noStrike" kern="1200" cap="none" spc="0" normalizeH="0" baseline="0" noProof="0" dirty="0">
                 <a:ln>
                   <a:noFill/>
@@ -12567,7 +12583,7 @@
                 <a:latin typeface="Times New Roman" charset="0"/>
                 <a:ea typeface="宋体" charset="0"/>
               </a:rPr>
-              <a:t>卫星测高原理及应用课程</a:t>
+              <a:t>课程</a:t>
             </a:r>
           </a:p>
         </p:txBody>
@@ -12716,14 +12732,11 @@
                 </a:pPr>
                 <a14:m>
                   <m:oMathPara xmlns:m="http://schemas.openxmlformats.org/officeDocument/2006/math">
-                    <m:oMathParaPr>
-                      <m:jc m:val="centerGroup"/>
-                    </m:oMathParaPr>
-                    <m:oMath xmlns:m="http://schemas.openxmlformats.org/officeDocument/2006/math">
+                    <m:oMath>
                       <m:sSub>
                         <m:sSubPr>
                           <m:ctrlPr>
-                            <a:rPr lang="en-CN" sz="1800" i="1" kern="0">
+                            <a:rPr lang="en-US" sz="1800" kern="0">
                               <a:solidFill>
                                 <a:srgbClr val="000000"/>
                               </a:solidFill>
@@ -12770,7 +12783,7 @@
                       <m:sSub>
                         <m:sSubPr>
                           <m:ctrlPr>
-                            <a:rPr lang="en-US" sz="1800" i="1" kern="0">
+                            <a:rPr lang="en-US" sz="1800" kern="0">
                               <a:solidFill>
                                 <a:srgbClr val="000000"/>
                               </a:solidFill>
@@ -12840,7 +12853,7 @@
                       <m:sSub>
                         <m:sSubPr>
                           <m:ctrlPr>
-                            <a:rPr lang="en-US" altLang="zh-CN" sz="1800" i="1" kern="0">
+                            <a:rPr lang="en-US" altLang="zh-CN" sz="1800" kern="0">
                               <a:solidFill>
                                 <a:srgbClr val="000000"/>
                               </a:solidFill>
@@ -12909,7 +12922,7 @@
                     <m:sSub>
                       <m:sSubPr>
                         <m:ctrlPr>
-                          <a:rPr lang="en-US" sz="1800" i="1" kern="0">
+                          <a:rPr lang="en-US" sz="1800" kern="0">
                             <a:solidFill>
                               <a:srgbClr val="000000"/>
                             </a:solidFill>
@@ -13819,7 +13832,7 @@
                       <m:sSub>
                         <m:sSubPr>
                           <m:ctrlPr>
-                            <a:rPr lang="en-CN" sz="1600" i="1" dirty="0" smtClean="0">
+                            <a:rPr lang="en-CN" sz="1600" i="1" dirty="0">
                               <a:solidFill>
                                 <a:schemeClr val="bg2"/>
                               </a:solidFill>
@@ -14042,7 +14055,7 @@
                       <m:sSub>
                         <m:sSubPr>
                           <m:ctrlPr>
-                            <a:rPr lang="en-CN" sz="1800" i="1" smtClean="0">
+                            <a:rPr lang="en-US" sz="1800" b="0" i="1" smtClean="0">
                               <a:solidFill>
                                 <a:schemeClr val="bg2"/>
                               </a:solidFill>
@@ -14274,7 +14287,7 @@
                     <m:sSub>
                       <m:sSubPr>
                         <m:ctrlPr>
-                          <a:rPr lang="en-US" altLang="zh-CN" sz="2000" i="1" kern="0" dirty="0">
+                          <a:rPr lang="en-US" altLang="zh-CN" sz="2000" kern="0" dirty="0">
                             <a:solidFill>
                               <a:srgbClr val="000000"/>
                             </a:solidFill>
@@ -14357,7 +14370,7 @@
                     <m:sSub>
                       <m:sSubPr>
                         <m:ctrlPr>
-                          <a:rPr lang="en-US" altLang="zh-CN" sz="2000" i="1" kern="0" dirty="0">
+                          <a:rPr lang="en-US" altLang="zh-CN" sz="2000" kern="0" dirty="0">
                             <a:solidFill>
                               <a:srgbClr val="000000"/>
                             </a:solidFill>
@@ -14475,10 +14488,7 @@
                 </a:pPr>
                 <a14:m>
                   <m:oMathPara xmlns:m="http://schemas.openxmlformats.org/officeDocument/2006/math">
-                    <m:oMathParaPr>
-                      <m:jc m:val="centerGroup"/>
-                    </m:oMathParaPr>
-                    <m:oMath xmlns:m="http://schemas.openxmlformats.org/officeDocument/2006/math">
+                    <m:oMath>
                       <m:r>
                         <a:rPr lang="en-US" altLang="zh-CN" sz="2000" b="1" i="0" kern="0" smtClean="0">
                           <a:solidFill>
@@ -14755,10 +14765,7 @@
                 </a:pPr>
                 <a14:m>
                   <m:oMathPara xmlns:m="http://schemas.openxmlformats.org/officeDocument/2006/math">
-                    <m:oMathParaPr>
-                      <m:jc m:val="centerGroup"/>
-                    </m:oMathParaPr>
-                    <m:oMath xmlns:m="http://schemas.openxmlformats.org/officeDocument/2006/math">
+                    <m:oMath>
                       <m:r>
                         <a:rPr lang="en-US" altLang="zh-CN" sz="2000" b="1" i="0" kern="0" smtClean="0">
                           <a:solidFill>
@@ -14804,7 +14811,7 @@
                           <m:sSub>
                             <m:sSubPr>
                               <m:ctrlPr>
-                                <a:rPr lang="en-US" altLang="zh-CN" sz="2000" b="1" i="1" kern="0" dirty="0">
+                                <a:rPr lang="en-US" altLang="zh-CN" sz="2000" b="1" i="0" kern="0" dirty="0">
                                   <a:solidFill>
                                     <a:srgbClr val="000000"/>
                                   </a:solidFill>
@@ -15248,7 +15255,7 @@
               </a:lnSpc>
             </a:pPr>
             <a:r>
-              <a:rPr lang="zh-CN" altLang="en-US" sz="2800" b="1">
+              <a:rPr lang="zh-CN" altLang="en-US" sz="2800" b="1" dirty="0">
                 <a:solidFill>
                   <a:srgbClr val="333333"/>
                 </a:solidFill>
